--- a/templates/35-process-modelling-template.pptx
+++ b/templates/35-process-modelling-template.pptx
@@ -3558,7 +3558,7 @@
         <p:spPr>
           <a:xfrm>
             <a:off x="457200" y="1207008"/>
-            <a:ext cx="2743200" cy="182880"/>
+            <a:ext cx="11277295" cy="274320"/>
           </a:xfrm>
           <a:prstGeom prst="rect">
             <a:avLst/>
@@ -3574,13 +3574,13 @@
           <a:p>
             <a:pPr algn="l"/>
             <a:r>
-              <a:rPr lang="en-AU" sz="800" b="1" dirty="0">
+              <a:rPr lang="en-AU" sz="1250" b="1" dirty="0">
                 <a:solidFill>
-                  <a:srgbClr val="6B6A66"/>
+                  <a:srgbClr val="184F95"/>
                 </a:solidFill>
                 <a:latin typeface="Aptos"/>
               </a:rPr>
-              <a:t>HOW TO FILL IT IN</a:t>
+              <a:t>Process Modelling — blank template</a:t>
             </a:r>
           </a:p>
         </p:txBody>
@@ -3593,8 +3593,8 @@
         </p:nvSpPr>
         <p:spPr>
           <a:xfrm>
-            <a:off x="457200" y="1408176"/>
-            <a:ext cx="2743200" cy="914400"/>
+            <a:off x="457200" y="6089904"/>
+            <a:ext cx="11277295" cy="347472"/>
           </a:xfrm>
           <a:prstGeom prst="rect">
             <a:avLst/>
@@ -3610,275 +3610,27 @@
           <a:p>
             <a:pPr algn="l"/>
             <a:r>
-              <a:rPr lang="en-AU" sz="950" dirty="0">
-                <a:solidFill>
-                  <a:srgbClr val="0B0B0B"/>
-                </a:solidFill>
-                <a:latin typeface="Aptos"/>
-              </a:rPr>
-              <a:t>Name a lane per party. Every arrow crossing a lane is a hand-off — those are where the work goes wrong.</a:t>
-            </a:r>
-          </a:p>
-        </p:txBody>
-      </p:sp>
-      <p:sp>
-        <p:nvSpPr>
-          <p:cNvPr id="59" name="shape59"/>
-          <p:cNvSpPr/>
-          <p:nvPr/>
-        </p:nvSpPr>
-        <p:spPr>
-          <a:xfrm>
-            <a:off x="457200" y="2414016"/>
-            <a:ext cx="2743200" cy="182880"/>
-          </a:xfrm>
-          <a:prstGeom prst="rect">
-            <a:avLst/>
-          </a:prstGeom>
-          <a:noFill/>
-          <a:ln>
-            <a:noFill/>
-          </a:ln>
-        </p:spPr>
-        <p:txBody>
-          <a:bodyPr wrap="square" anchor="b" lIns="0" rIns="0" tIns="27432" bIns="27432"/>
-          <a:lstStyle/>
-          <a:p>
-            <a:pPr algn="l"/>
-            <a:r>
-              <a:rPr lang="en-AU" sz="800" b="1" dirty="0">
+              <a:rPr lang="en-AU" sz="850" dirty="0">
                 <a:solidFill>
                   <a:srgbClr val="6B6A66"/>
                 </a:solidFill>
                 <a:latin typeface="Aptos"/>
               </a:rPr>
-              <a:t>WHAT IT IS FOR</a:t>
-            </a:r>
-          </a:p>
-        </p:txBody>
-      </p:sp>
-      <p:sp>
-        <p:nvSpPr>
-          <p:cNvPr id="60" name="shape60"/>
+              <a:t>Name a lane per party. Every arrow crossing a lane is a hand-off — those are where the work goes wrong.</a:t>
+            </a:r>
+          </a:p>
+        </p:txBody>
+      </p:sp>
+      <p:sp>
+        <p:nvSpPr>
+          <p:cNvPr id="59" name="shape59"/>
           <p:cNvSpPr/>
           <p:nvPr/>
         </p:nvSpPr>
         <p:spPr>
           <a:xfrm>
-            <a:off x="457200" y="2615184"/>
-            <a:ext cx="2743200" cy="731520"/>
-          </a:xfrm>
-          <a:prstGeom prst="rect">
-            <a:avLst/>
-          </a:prstGeom>
-          <a:noFill/>
-          <a:ln>
-            <a:noFill/>
-          </a:ln>
-        </p:spPr>
-        <p:txBody>
-          <a:bodyPr wrap="square" anchor="t" lIns="0" rIns="0" tIns="27432" bIns="27432"/>
-          <a:lstStyle/>
-          <a:p>
-            <a:pPr algn="l"/>
-            <a:r>
-              <a:rPr lang="en-AU" sz="950" dirty="0">
-                <a:solidFill>
-                  <a:srgbClr val="0B0B0B"/>
-                </a:solidFill>
-                <a:latin typeface="Aptos"/>
-              </a:rPr>
-              <a:t>Depicts the sequence of activities, decisions, actors and hand-offs that produce an outcome.</a:t>
-            </a:r>
-          </a:p>
-        </p:txBody>
-      </p:sp>
-      <p:sp>
-        <p:nvSpPr>
-          <p:cNvPr id="61" name="shape61"/>
-          <p:cNvSpPr/>
-          <p:nvPr/>
-        </p:nvSpPr>
-        <p:spPr>
-          <a:xfrm>
-            <a:off x="457200" y="3438144"/>
-            <a:ext cx="2743200" cy="182880"/>
-          </a:xfrm>
-          <a:prstGeom prst="rect">
-            <a:avLst/>
-          </a:prstGeom>
-          <a:noFill/>
-          <a:ln>
-            <a:noFill/>
-          </a:ln>
-        </p:spPr>
-        <p:txBody>
-          <a:bodyPr wrap="square" anchor="b" lIns="0" rIns="0" tIns="27432" bIns="27432"/>
-          <a:lstStyle/>
-          <a:p>
-            <a:pPr algn="l"/>
-            <a:r>
-              <a:rPr lang="en-AU" sz="800" b="1" dirty="0">
-                <a:solidFill>
-                  <a:srgbClr val="6B6A66"/>
-                </a:solidFill>
-                <a:latin typeface="Aptos"/>
-              </a:rPr>
-              <a:t>MOST OFTEN CONFUSED WITH</a:t>
-            </a:r>
-          </a:p>
-        </p:txBody>
-      </p:sp>
-      <p:sp>
-        <p:nvSpPr>
-          <p:cNvPr id="62" name="shape62"/>
-          <p:cNvSpPr/>
-          <p:nvPr/>
-        </p:nvSpPr>
-        <p:spPr>
-          <a:xfrm>
-            <a:off x="457200" y="3639312"/>
-            <a:ext cx="2743200" cy="1737360"/>
-          </a:xfrm>
-          <a:prstGeom prst="rect">
-            <a:avLst/>
-          </a:prstGeom>
-          <a:solidFill>
-            <a:srgbClr val="F7F7F5"/>
-          </a:solidFill>
-          <a:ln>
-            <a:noFill/>
-          </a:ln>
-        </p:spPr>
-        <p:txBody>
-          <a:bodyPr wrap="square" anchor="t" lIns="91440" rIns="91440" tIns="27432" bIns="27432"/>
-          <a:lstStyle/>
-          <a:p>
-            <a:pPr algn="l"/>
-            <a:r>
-              <a:rPr lang="en-AU" sz="900" dirty="0">
-                <a:solidFill>
-                  <a:srgbClr val="0B0B0B"/>
-                </a:solidFill>
-                <a:latin typeface="Aptos"/>
-              </a:rPr>
-              <a:t>Process modelling shows the flow of work; use cases show an actor achieving a goal with the solution; data flow diagrams follow information. Hand-offs between people point to process.</a:t>
-            </a:r>
-          </a:p>
-        </p:txBody>
-      </p:sp>
-      <p:sp>
-        <p:nvSpPr>
-          <p:cNvPr id="63" name="shape63"/>
-          <p:cNvSpPr/>
-          <p:nvPr/>
-        </p:nvSpPr>
-        <p:spPr>
-          <a:xfrm>
-            <a:off x="457200" y="3639312"/>
-            <a:ext cx="32004" cy="1737360"/>
-          </a:xfrm>
-          <a:prstGeom prst="rect">
-            <a:avLst/>
-          </a:prstGeom>
-          <a:solidFill>
-            <a:srgbClr val="FAB219"/>
-          </a:solidFill>
-          <a:ln>
-            <a:noFill/>
-          </a:ln>
-        </p:spPr>
-        <p:txBody>
-          <a:bodyPr wrap="square" anchor="ctr" lIns="54864" rIns="54864" tIns="27432" bIns="27432"/>
-          <a:lstStyle/>
-          <a:p>
-            <a:pPr algn="l"/>
-            <a:endParaRPr lang="en-AU" sz="1100"/>
-          </a:p>
-        </p:txBody>
-      </p:sp>
-      <p:sp>
-        <p:nvSpPr>
-          <p:cNvPr id="64" name="shape64"/>
-          <p:cNvSpPr/>
-          <p:nvPr/>
-        </p:nvSpPr>
-        <p:spPr>
-          <a:xfrm>
-            <a:off x="457200" y="5486400"/>
-            <a:ext cx="2743200" cy="502920"/>
-          </a:xfrm>
-          <a:prstGeom prst="rect">
-            <a:avLst/>
-          </a:prstGeom>
-          <a:noFill/>
-          <a:ln>
-            <a:noFill/>
-          </a:ln>
-        </p:spPr>
-        <p:txBody>
-          <a:bodyPr wrap="square" anchor="t" lIns="0" rIns="0" tIns="27432" bIns="27432"/>
-          <a:lstStyle/>
-          <a:p>
-            <a:pPr algn="l"/>
-            <a:r>
-              <a:rPr lang="en-AU" sz="800" dirty="0">
-                <a:solidFill>
-                  <a:srgbClr val="6B6A66"/>
-                </a:solidFill>
-                <a:latin typeface="Aptos"/>
-              </a:rPr>
-              <a:t>Tasks: 7.1 Specify and Model Requirements · 6.1 Analyze Current State · 6.2 Define Future State</a:t>
-            </a:r>
-          </a:p>
-        </p:txBody>
-      </p:sp>
-      <p:sp>
-        <p:nvSpPr>
-          <p:cNvPr id="65" name="shape65"/>
-          <p:cNvSpPr/>
-          <p:nvPr/>
-        </p:nvSpPr>
-        <p:spPr>
-          <a:xfrm>
-            <a:off x="3520440" y="1188720"/>
-            <a:ext cx="8214055" cy="237744"/>
-          </a:xfrm>
-          <a:prstGeom prst="rect">
-            <a:avLst/>
-          </a:prstGeom>
-          <a:noFill/>
-          <a:ln>
-            <a:noFill/>
-          </a:ln>
-        </p:spPr>
-        <p:txBody>
-          <a:bodyPr wrap="square" anchor="b" lIns="0" rIns="0" tIns="27432" bIns="27432"/>
-          <a:lstStyle/>
-          <a:p>
-            <a:pPr algn="l"/>
-            <a:r>
-              <a:rPr lang="en-AU" sz="1050" b="1" dirty="0">
-                <a:solidFill>
-                  <a:srgbClr val="184F95"/>
-                </a:solidFill>
-                <a:latin typeface="Aptos"/>
-              </a:rPr>
-              <a:t>Process Modelling — blank template</a:t>
-            </a:r>
-          </a:p>
-        </p:txBody>
-      </p:sp>
-      <p:sp>
-        <p:nvSpPr>
-          <p:cNvPr id="66" name="shape66"/>
-          <p:cNvSpPr/>
-          <p:nvPr/>
-        </p:nvSpPr>
-        <p:spPr>
-          <a:xfrm>
-            <a:off x="3520440" y="1499616"/>
-            <a:ext cx="8214055" cy="713232"/>
+            <a:off x="457200" y="1700784"/>
+            <a:ext cx="11277295" cy="808330"/>
           </a:xfrm>
           <a:prstGeom prst="rect">
             <a:avLst/>
@@ -3903,14 +3655,14 @@
       </p:sp>
       <p:sp>
         <p:nvSpPr>
-          <p:cNvPr id="67" name="shape67"/>
+          <p:cNvPr id="60" name="shape60"/>
           <p:cNvSpPr/>
           <p:nvPr/>
         </p:nvSpPr>
         <p:spPr>
           <a:xfrm>
-            <a:off x="3557016" y="1499616"/>
-            <a:ext cx="1024128" cy="713232"/>
+            <a:off x="493776" y="1700784"/>
+            <a:ext cx="1024128" cy="808330"/>
           </a:xfrm>
           <a:prstGeom prst="rect">
             <a:avLst/>
@@ -3939,14 +3691,14 @@
       </p:sp>
       <p:sp>
         <p:nvSpPr>
-          <p:cNvPr id="68" name="shape68"/>
+          <p:cNvPr id="61" name="shape61"/>
           <p:cNvSpPr/>
           <p:nvPr/>
         </p:nvSpPr>
         <p:spPr>
           <a:xfrm>
-            <a:off x="3520440" y="2212848"/>
-            <a:ext cx="8214055" cy="713232"/>
+            <a:off x="457200" y="2509114"/>
+            <a:ext cx="11277295" cy="808330"/>
           </a:xfrm>
           <a:prstGeom prst="rect">
             <a:avLst/>
@@ -3971,14 +3723,14 @@
       </p:sp>
       <p:sp>
         <p:nvSpPr>
-          <p:cNvPr id="69" name="shape69"/>
+          <p:cNvPr id="62" name="shape62"/>
           <p:cNvSpPr/>
           <p:nvPr/>
         </p:nvSpPr>
         <p:spPr>
           <a:xfrm>
-            <a:off x="3557016" y="2212848"/>
-            <a:ext cx="1024128" cy="713232"/>
+            <a:off x="493776" y="2509114"/>
+            <a:ext cx="1024128" cy="808330"/>
           </a:xfrm>
           <a:prstGeom prst="rect">
             <a:avLst/>
@@ -4007,14 +3759,14 @@
       </p:sp>
       <p:sp>
         <p:nvSpPr>
-          <p:cNvPr id="70" name="shape70"/>
+          <p:cNvPr id="63" name="shape63"/>
           <p:cNvSpPr/>
           <p:nvPr/>
         </p:nvSpPr>
         <p:spPr>
           <a:xfrm>
-            <a:off x="3520440" y="2926080"/>
-            <a:ext cx="8214055" cy="713232"/>
+            <a:off x="457200" y="3317443"/>
+            <a:ext cx="11277295" cy="808330"/>
           </a:xfrm>
           <a:prstGeom prst="rect">
             <a:avLst/>
@@ -4039,14 +3791,14 @@
       </p:sp>
       <p:sp>
         <p:nvSpPr>
-          <p:cNvPr id="71" name="shape71"/>
+          <p:cNvPr id="64" name="shape64"/>
           <p:cNvSpPr/>
           <p:nvPr/>
         </p:nvSpPr>
         <p:spPr>
           <a:xfrm>
-            <a:off x="3557016" y="2926080"/>
-            <a:ext cx="1024128" cy="713232"/>
+            <a:off x="493776" y="3317443"/>
+            <a:ext cx="1024128" cy="808330"/>
           </a:xfrm>
           <a:prstGeom prst="rect">
             <a:avLst/>
@@ -4075,14 +3827,14 @@
       </p:sp>
       <p:sp>
         <p:nvSpPr>
-          <p:cNvPr id="72" name="shape72"/>
+          <p:cNvPr id="65" name="shape65"/>
           <p:cNvSpPr/>
           <p:nvPr/>
         </p:nvSpPr>
         <p:spPr>
           <a:xfrm>
-            <a:off x="3520440" y="3639312"/>
-            <a:ext cx="8214055" cy="713232"/>
+            <a:off x="457200" y="4125773"/>
+            <a:ext cx="11277295" cy="808330"/>
           </a:xfrm>
           <a:prstGeom prst="rect">
             <a:avLst/>
@@ -4107,14 +3859,14 @@
       </p:sp>
       <p:sp>
         <p:nvSpPr>
-          <p:cNvPr id="73" name="shape73"/>
+          <p:cNvPr id="66" name="shape66"/>
           <p:cNvSpPr/>
           <p:nvPr/>
         </p:nvSpPr>
         <p:spPr>
           <a:xfrm>
-            <a:off x="3557016" y="3639312"/>
-            <a:ext cx="1024128" cy="713232"/>
+            <a:off x="493776" y="4125773"/>
+            <a:ext cx="1024128" cy="808330"/>
           </a:xfrm>
           <a:prstGeom prst="rect">
             <a:avLst/>
@@ -4143,14 +3895,14 @@
       </p:sp>
       <p:sp>
         <p:nvSpPr>
-          <p:cNvPr id="74" name="shape74"/>
+          <p:cNvPr id="67" name="shape67"/>
           <p:cNvSpPr/>
           <p:nvPr/>
         </p:nvSpPr>
         <p:spPr>
           <a:xfrm>
-            <a:off x="3520440" y="4352544"/>
-            <a:ext cx="8214055" cy="713232"/>
+            <a:off x="457200" y="4934102"/>
+            <a:ext cx="11277295" cy="808330"/>
           </a:xfrm>
           <a:prstGeom prst="rect">
             <a:avLst/>
@@ -4175,14 +3927,14 @@
       </p:sp>
       <p:sp>
         <p:nvSpPr>
-          <p:cNvPr id="75" name="shape75"/>
+          <p:cNvPr id="68" name="shape68"/>
           <p:cNvSpPr/>
           <p:nvPr/>
         </p:nvSpPr>
         <p:spPr>
           <a:xfrm>
-            <a:off x="3557016" y="4352544"/>
-            <a:ext cx="1024128" cy="713232"/>
+            <a:off x="493776" y="4934102"/>
+            <a:ext cx="1024128" cy="808330"/>
           </a:xfrm>
           <a:prstGeom prst="rect">
             <a:avLst/>
@@ -4211,14 +3963,14 @@
       </p:sp>
       <p:cxnSp>
         <p:nvCxnSpPr>
-          <p:cNvPr id="76" name="conn76"/>
+          <p:cNvPr id="69" name="conn69"/>
           <p:cNvCxnSpPr/>
           <p:nvPr/>
         </p:nvCxnSpPr>
         <p:spPr>
           <a:xfrm>
-            <a:off x="5739841" y="1856232"/>
-            <a:ext cx="64008" cy="1"/>
+            <a:off x="3020035" y="2104949"/>
+            <a:ext cx="231115" cy="1"/>
           </a:xfrm>
           <a:prstGeom prst="line">
             <a:avLst/>
@@ -4232,14 +3984,14 @@
       </p:cxnSp>
       <p:cxnSp>
         <p:nvCxnSpPr>
-          <p:cNvPr id="77" name="conn77"/>
+          <p:cNvPr id="70" name="conn70"/>
           <p:cNvCxnSpPr/>
           <p:nvPr/>
         </p:nvCxnSpPr>
         <p:spPr>
           <a:xfrm>
-            <a:off x="5803849" y="1856232"/>
-            <a:ext cx="1" cy="713232"/>
+            <a:off x="3251149" y="2104949"/>
+            <a:ext cx="1" cy="808330"/>
           </a:xfrm>
           <a:prstGeom prst="line">
             <a:avLst/>
@@ -4253,14 +4005,14 @@
       </p:cxnSp>
       <p:cxnSp>
         <p:nvCxnSpPr>
-          <p:cNvPr id="78" name="conn78"/>
+          <p:cNvPr id="71" name="conn71"/>
           <p:cNvCxnSpPr/>
           <p:nvPr/>
         </p:nvCxnSpPr>
         <p:spPr>
           <a:xfrm>
-            <a:off x="5803849" y="2569464"/>
-            <a:ext cx="64008" cy="1"/>
+            <a:off x="3251149" y="2913278"/>
+            <a:ext cx="231115" cy="1"/>
           </a:xfrm>
           <a:prstGeom prst="line">
             <a:avLst/>
@@ -4275,14 +4027,14 @@
       </p:cxnSp>
       <p:cxnSp>
         <p:nvCxnSpPr>
-          <p:cNvPr id="79" name="conn79"/>
+          <p:cNvPr id="72" name="conn72"/>
           <p:cNvCxnSpPr/>
           <p:nvPr/>
         </p:nvCxnSpPr>
         <p:spPr>
           <a:xfrm>
-            <a:off x="6925970" y="2569464"/>
-            <a:ext cx="64008" cy="1"/>
+            <a:off x="4716704" y="2913278"/>
+            <a:ext cx="231115" cy="1"/>
           </a:xfrm>
           <a:prstGeom prst="line">
             <a:avLst/>
@@ -4296,14 +4048,14 @@
       </p:cxnSp>
       <p:cxnSp>
         <p:nvCxnSpPr>
-          <p:cNvPr id="80" name="conn80"/>
+          <p:cNvPr id="73" name="conn73"/>
           <p:cNvCxnSpPr/>
           <p:nvPr/>
         </p:nvCxnSpPr>
         <p:spPr>
           <a:xfrm>
-            <a:off x="6989978" y="2569464"/>
-            <a:ext cx="1" cy="713232"/>
+            <a:off x="4947818" y="2913278"/>
+            <a:ext cx="1" cy="808330"/>
           </a:xfrm>
           <a:prstGeom prst="line">
             <a:avLst/>
@@ -4317,14 +4069,14 @@
       </p:cxnSp>
       <p:cxnSp>
         <p:nvCxnSpPr>
-          <p:cNvPr id="81" name="conn81"/>
+          <p:cNvPr id="74" name="conn74"/>
           <p:cNvCxnSpPr/>
           <p:nvPr/>
         </p:nvCxnSpPr>
         <p:spPr>
           <a:xfrm>
-            <a:off x="6989978" y="3282696"/>
-            <a:ext cx="64008" cy="1"/>
+            <a:off x="4947818" y="3721608"/>
+            <a:ext cx="231115" cy="1"/>
           </a:xfrm>
           <a:prstGeom prst="line">
             <a:avLst/>
@@ -4339,14 +4091,14 @@
       </p:cxnSp>
       <p:cxnSp>
         <p:nvCxnSpPr>
-          <p:cNvPr id="82" name="conn82"/>
+          <p:cNvPr id="75" name="conn75"/>
           <p:cNvCxnSpPr/>
           <p:nvPr/>
         </p:nvCxnSpPr>
         <p:spPr>
           <a:xfrm>
-            <a:off x="8112100" y="3282696"/>
-            <a:ext cx="64008" cy="1"/>
+            <a:off x="6413373" y="3721608"/>
+            <a:ext cx="231115" cy="1"/>
           </a:xfrm>
           <a:prstGeom prst="line">
             <a:avLst/>
@@ -4360,14 +4112,14 @@
       </p:cxnSp>
       <p:cxnSp>
         <p:nvCxnSpPr>
-          <p:cNvPr id="83" name="conn83"/>
+          <p:cNvPr id="76" name="conn76"/>
           <p:cNvCxnSpPr/>
           <p:nvPr/>
         </p:nvCxnSpPr>
         <p:spPr>
           <a:xfrm>
-            <a:off x="8176108" y="3282696"/>
-            <a:ext cx="1" cy="713232"/>
+            <a:off x="6644488" y="3721608"/>
+            <a:ext cx="1" cy="808330"/>
           </a:xfrm>
           <a:prstGeom prst="line">
             <a:avLst/>
@@ -4381,14 +4133,14 @@
       </p:cxnSp>
       <p:cxnSp>
         <p:nvCxnSpPr>
-          <p:cNvPr id="84" name="conn84"/>
+          <p:cNvPr id="77" name="conn77"/>
           <p:cNvCxnSpPr/>
           <p:nvPr/>
         </p:nvCxnSpPr>
         <p:spPr>
           <a:xfrm>
-            <a:off x="8176108" y="3995928"/>
-            <a:ext cx="64008" cy="1"/>
+            <a:off x="6644488" y="4529938"/>
+            <a:ext cx="231115" cy="1"/>
           </a:xfrm>
           <a:prstGeom prst="line">
             <a:avLst/>
@@ -4403,14 +4155,14 @@
       </p:cxnSp>
       <p:cxnSp>
         <p:nvCxnSpPr>
-          <p:cNvPr id="85" name="conn85"/>
+          <p:cNvPr id="78" name="conn78"/>
           <p:cNvCxnSpPr/>
           <p:nvPr/>
         </p:nvCxnSpPr>
         <p:spPr>
           <a:xfrm>
-            <a:off x="9298229" y="3995928"/>
-            <a:ext cx="64008" cy="1"/>
+            <a:off x="8110042" y="4529938"/>
+            <a:ext cx="231115" cy="1"/>
           </a:xfrm>
           <a:prstGeom prst="line">
             <a:avLst/>
@@ -4424,14 +4176,14 @@
       </p:cxnSp>
       <p:cxnSp>
         <p:nvCxnSpPr>
-          <p:cNvPr id="86" name="conn86"/>
+          <p:cNvPr id="79" name="conn79"/>
           <p:cNvCxnSpPr/>
           <p:nvPr/>
         </p:nvCxnSpPr>
         <p:spPr>
           <a:xfrm flipV="1">
-            <a:off x="9362237" y="3282696"/>
-            <a:ext cx="1" cy="713232"/>
+            <a:off x="8341157" y="3721608"/>
+            <a:ext cx="1" cy="808330"/>
           </a:xfrm>
           <a:prstGeom prst="line">
             <a:avLst/>
@@ -4445,14 +4197,14 @@
       </p:cxnSp>
       <p:cxnSp>
         <p:nvCxnSpPr>
-          <p:cNvPr id="87" name="conn87"/>
+          <p:cNvPr id="80" name="conn80"/>
           <p:cNvCxnSpPr/>
           <p:nvPr/>
         </p:nvCxnSpPr>
         <p:spPr>
           <a:xfrm>
-            <a:off x="9362237" y="3282696"/>
-            <a:ext cx="64008" cy="1"/>
+            <a:off x="8341157" y="3721608"/>
+            <a:ext cx="231115" cy="1"/>
           </a:xfrm>
           <a:prstGeom prst="line">
             <a:avLst/>
@@ -4467,14 +4219,14 @@
       </p:cxnSp>
       <p:cxnSp>
         <p:nvCxnSpPr>
-          <p:cNvPr id="88" name="conn88"/>
+          <p:cNvPr id="81" name="conn81"/>
           <p:cNvCxnSpPr/>
           <p:nvPr/>
         </p:nvCxnSpPr>
         <p:spPr>
           <a:xfrm>
-            <a:off x="10484358" y="3282696"/>
-            <a:ext cx="64008" cy="1"/>
+            <a:off x="9806711" y="3721608"/>
+            <a:ext cx="231115" cy="1"/>
           </a:xfrm>
           <a:prstGeom prst="line">
             <a:avLst/>
@@ -4488,14 +4240,14 @@
       </p:cxnSp>
       <p:cxnSp>
         <p:nvCxnSpPr>
-          <p:cNvPr id="89" name="conn89"/>
+          <p:cNvPr id="82" name="conn82"/>
           <p:cNvCxnSpPr/>
           <p:nvPr/>
         </p:nvCxnSpPr>
         <p:spPr>
           <a:xfrm>
-            <a:off x="10548366" y="3282696"/>
-            <a:ext cx="1" cy="1426464"/>
+            <a:off x="10037826" y="3721608"/>
+            <a:ext cx="1" cy="1616659"/>
           </a:xfrm>
           <a:prstGeom prst="line">
             <a:avLst/>
@@ -4509,14 +4261,14 @@
       </p:cxnSp>
       <p:cxnSp>
         <p:nvCxnSpPr>
-          <p:cNvPr id="90" name="conn90"/>
+          <p:cNvPr id="83" name="conn83"/>
           <p:cNvCxnSpPr/>
           <p:nvPr/>
         </p:nvCxnSpPr>
         <p:spPr>
           <a:xfrm>
-            <a:off x="10548366" y="4709160"/>
-            <a:ext cx="64008" cy="1"/>
+            <a:off x="10037826" y="5338267"/>
+            <a:ext cx="231115" cy="1"/>
           </a:xfrm>
           <a:prstGeom prst="line">
             <a:avLst/>
@@ -4531,14 +4283,14 @@
       </p:cxnSp>
       <p:sp>
         <p:nvSpPr>
-          <p:cNvPr id="91" name="shape91"/>
+          <p:cNvPr id="84" name="shape84"/>
           <p:cNvSpPr/>
           <p:nvPr/>
         </p:nvSpPr>
         <p:spPr>
           <a:xfrm>
-            <a:off x="4681728" y="1618488"/>
-            <a:ext cx="1058113" cy="475488"/>
+            <a:off x="1785595" y="1867205"/>
+            <a:ext cx="1234440" cy="475488"/>
           </a:xfrm>
           <a:prstGeom prst="roundRect">
             <a:avLst>
@@ -4573,14 +4325,14 @@
       </p:sp>
       <p:sp>
         <p:nvSpPr>
-          <p:cNvPr id="92" name="shape92"/>
+          <p:cNvPr id="85" name="shape85"/>
           <p:cNvSpPr/>
           <p:nvPr/>
         </p:nvSpPr>
         <p:spPr>
           <a:xfrm>
-            <a:off x="5867857" y="2331720"/>
-            <a:ext cx="1058113" cy="475488"/>
+            <a:off x="3482264" y="2675534"/>
+            <a:ext cx="1234440" cy="475488"/>
           </a:xfrm>
           <a:prstGeom prst="roundRect">
             <a:avLst>
@@ -4615,14 +4367,14 @@
       </p:sp>
       <p:sp>
         <p:nvSpPr>
-          <p:cNvPr id="93" name="shape93"/>
+          <p:cNvPr id="86" name="shape86"/>
           <p:cNvSpPr/>
           <p:nvPr/>
         </p:nvSpPr>
         <p:spPr>
           <a:xfrm>
-            <a:off x="7053986" y="3044952"/>
-            <a:ext cx="1058113" cy="475488"/>
+            <a:off x="5178933" y="3483864"/>
+            <a:ext cx="1234440" cy="475488"/>
           </a:xfrm>
           <a:prstGeom prst="roundRect">
             <a:avLst>
@@ -4657,14 +4409,14 @@
       </p:sp>
       <p:sp>
         <p:nvSpPr>
-          <p:cNvPr id="94" name="shape94"/>
+          <p:cNvPr id="87" name="shape87"/>
           <p:cNvSpPr/>
           <p:nvPr/>
         </p:nvSpPr>
         <p:spPr>
           <a:xfrm>
-            <a:off x="8240116" y="3758184"/>
-            <a:ext cx="1058113" cy="475488"/>
+            <a:off x="6875602" y="4292194"/>
+            <a:ext cx="1234440" cy="475488"/>
           </a:xfrm>
           <a:prstGeom prst="roundRect">
             <a:avLst>
@@ -4699,14 +4451,14 @@
       </p:sp>
       <p:sp>
         <p:nvSpPr>
-          <p:cNvPr id="95" name="shape95"/>
+          <p:cNvPr id="88" name="shape88"/>
           <p:cNvSpPr/>
           <p:nvPr/>
         </p:nvSpPr>
         <p:spPr>
           <a:xfrm>
-            <a:off x="9426245" y="3044952"/>
-            <a:ext cx="1058113" cy="475488"/>
+            <a:off x="8572271" y="3483864"/>
+            <a:ext cx="1234440" cy="475488"/>
           </a:xfrm>
           <a:prstGeom prst="roundRect">
             <a:avLst>
@@ -4741,14 +4493,14 @@
       </p:sp>
       <p:sp>
         <p:nvSpPr>
-          <p:cNvPr id="96" name="shape96"/>
+          <p:cNvPr id="89" name="shape89"/>
           <p:cNvSpPr/>
           <p:nvPr/>
         </p:nvSpPr>
         <p:spPr>
           <a:xfrm>
-            <a:off x="10612374" y="4471416"/>
-            <a:ext cx="1058113" cy="475488"/>
+            <a:off x="10268941" y="5100523"/>
+            <a:ext cx="1234440" cy="475488"/>
           </a:xfrm>
           <a:prstGeom prst="roundRect">
             <a:avLst>
